--- a/Customer_Churn_Final.pptx
+++ b/Customer_Churn_Final.pptx
@@ -5,7 +5,7 @@
     <p:sldMasterId id="2147483648" r:id="rId1"/>
   </p:sldMasterIdLst>
   <p:notesMasterIdLst>
-    <p:notesMasterId r:id="rId17"/>
+    <p:notesMasterId r:id="rId19"/>
   </p:notesMasterIdLst>
   <p:sldIdLst>
     <p:sldId id="275" r:id="rId2"/>
@@ -23,8 +23,8 @@
     <p:sldId id="273" r:id="rId14"/>
     <p:sldId id="274" r:id="rId15"/>
     <p:sldId id="261" r:id="rId16"/>
-    <p:sldId id="276" r:id="rId22"/>
-    <p:sldId id="277" r:id="rId23"/>
+    <p:sldId id="276" r:id="rId17"/>
+    <p:sldId id="277" r:id="rId18"/>
   </p:sldIdLst>
   <p:sldSz cx="9144000" cy="5143500" type="screen16x9"/>
   <p:notesSz cx="5143500" cy="9144000"/>
@@ -2069,7 +2069,7 @@
                 <a:ea typeface="Calibri" pitchFamily="34" charset="-122"/>
                 <a:cs typeface="Calibri" pitchFamily="34" charset="-120"/>
               </a:rPr>
-              <a:t>Ella Ndalla  |  Senior Data Scientist</a:t>
+              <a:t>Ella Ndalla  |  Data Scientist</a:t>
             </a:r>
             <a:endParaRPr lang="en-US" sz="1200" dirty="0"/>
           </a:p>
@@ -2564,7 +2564,7 @@
                 <a:ea typeface="Trebuchet MS" pitchFamily="34" charset="-122"/>
                 <a:cs typeface="Trebuchet MS" pitchFamily="34" charset="-120"/>
               </a:rPr>
-              <a:t xml:space="preserve">  Experimental Design: 3 Prioritised Bayesian Tests</a:t>
+              <a:t>  Experimental Design: 3 Prioritised Bayesian Tests</a:t>
             </a:r>
             <a:endParaRPr lang="en-US" sz="2200" dirty="0"/>
           </a:p>
@@ -4964,7 +4964,7 @@
                 <a:ea typeface="Trebuchet MS" pitchFamily="34" charset="-122"/>
                 <a:cs typeface="Trebuchet MS" pitchFamily="34" charset="-120"/>
               </a:rPr>
-              <a:t xml:space="preserve">  Expected Impact: $350K Annual Profit (Conservative)</a:t>
+              <a:t>  Expected Impact: $350K Annual Profit (Conservative)</a:t>
             </a:r>
             <a:endParaRPr lang="en-US" sz="2200" dirty="0"/>
           </a:p>
@@ -6272,7 +6272,7 @@
                 </a:solidFill>
                 <a:latin typeface="Trebuchet MS" pitchFamily="34" charset="0"/>
               </a:rPr>
-              <a:t xml:space="preserve">  Phase 4: Bayesian Monitoring — Experiment Results</a:t>
+              <a:t> Bayesian Monitoring — Experiment Results</a:t>
             </a:r>
           </a:p>
         </p:txBody>
@@ -7508,7 +7508,7 @@
                 </a:solidFill>
                 <a:latin typeface="Trebuchet MS" pitchFamily="34" charset="0"/>
               </a:rPr>
-              <a:t xml:space="preserve">  Phase 5: Cloud Deployment — Live Bayesian Dashboard</a:t>
+              <a:t>  Cloud Deployment — Live Bayesian Dashboard</a:t>
             </a:r>
           </a:p>
         </p:txBody>
@@ -7613,7 +7613,7 @@
               <a:buNone/>
             </a:pPr>
             <a:r>
-              <a:rPr lang="en-US" sz="1400" b="1" dirty="0">
+              <a:rPr lang="en-US" sz="1400" dirty="0">
                 <a:solidFill>
                   <a:srgbClr val="CADCFC"/>
                 </a:solidFill>
@@ -8834,7 +8834,7 @@
                 <a:latin typeface="Calibri" pitchFamily="34" charset="0"/>
                 <a:cs typeface="Calibri" pitchFamily="34" charset="-120"/>
               </a:rPr>
-              <a:t xml:space="preserve">Min Churn Rate Among </a:t>
+              <a:t>Min Churn Rate Among </a:t>
             </a:r>
           </a:p>
           <a:p>
@@ -9493,7 +9493,7 @@
                 <a:ea typeface="Trebuchet MS" pitchFamily="34" charset="-122"/>
                 <a:cs typeface="Trebuchet MS" pitchFamily="34" charset="-120"/>
               </a:rPr>
-              <a:t xml:space="preserve">  The Problem</a:t>
+              <a:t>  The Problem</a:t>
             </a:r>
             <a:endParaRPr lang="en-US" sz="2200" dirty="0"/>
           </a:p>
@@ -11119,7 +11119,7 @@
                 <a:ea typeface="Calibri" pitchFamily="34" charset="-122"/>
                 <a:cs typeface="Calibri" pitchFamily="34" charset="-120"/>
               </a:rPr>
-              <a:t xml:space="preserve">H2O </a:t>
+              <a:t>H2O </a:t>
             </a:r>
             <a:r>
               <a:rPr lang="en-US" sz="1050" dirty="0" err="1">
@@ -11141,7 +11141,7 @@
                 <a:ea typeface="Calibri" pitchFamily="34" charset="-122"/>
                 <a:cs typeface="Calibri" pitchFamily="34" charset="-120"/>
               </a:rPr>
-              <a:t xml:space="preserve"> – Stacked Ensemble</a:t>
+              <a:t> – Stacked Ensemble</a:t>
             </a:r>
             <a:endParaRPr lang="en-US" sz="1050" dirty="0"/>
           </a:p>
@@ -11969,7 +11969,13 @@
           <p:cNvGraphicFramePr>
             <a:graphicFrameLocks noGrp="1"/>
           </p:cNvGraphicFramePr>
-          <p:nvPr/>
+          <p:nvPr>
+            <p:extLst>
+              <p:ext uri="{D42A27DB-BD31-4B8C-83A1-F6EECF244321}">
+                <p14:modId xmlns:p14="http://schemas.microsoft.com/office/powerpoint/2010/main" val="1417040940"/>
+              </p:ext>
+            </p:extLst>
+          </p:nvPr>
         </p:nvGraphicFramePr>
         <p:xfrm>
           <a:off x="365760" y="1170432"/>
@@ -12367,7 +12373,7 @@
                           <a:ea typeface="Calibri" pitchFamily="34" charset="-122"/>
                           <a:cs typeface="Calibri" pitchFamily="34" charset="-120"/>
                         </a:rPr>
-                        <a:t>93.4% ✓</a:t>
+                        <a:t>96.72% ✓</a:t>
                       </a:r>
                       <a:endParaRPr lang="en-US" sz="1100" dirty="0">
                         <a:latin typeface="Calibri" charset="0"/>
@@ -12578,7 +12584,7 @@
                           <a:ea typeface="Calibri" pitchFamily="34" charset="-122"/>
                           <a:cs typeface="Calibri" pitchFamily="34" charset="-120"/>
                         </a:rPr>
-                        <a:t>96.72% ✓</a:t>
+                        <a:t>93.4% ✓</a:t>
                       </a:r>
                       <a:endParaRPr lang="en-US" sz="1100" dirty="0">
                         <a:latin typeface="Calibri" charset="0"/>
@@ -13690,7 +13696,7 @@
                 <a:ea typeface="Trebuchet MS" pitchFamily="34" charset="-122"/>
                 <a:cs typeface="Trebuchet MS" pitchFamily="34" charset="-120"/>
               </a:rPr>
-              <a:t xml:space="preserve">  ML Analysis: H2O AutoML Stacked Ensemble — Best Model</a:t>
+              <a:t>  ML Analysis: H2O AutoML Stacked Ensemble — Best Model</a:t>
             </a:r>
             <a:endParaRPr lang="en-US" sz="2200" dirty="0"/>
           </a:p>
@@ -16249,7 +16255,7 @@
                 <a:ea typeface="Trebuchet MS" pitchFamily="34" charset="-122"/>
                 <a:cs typeface="Trebuchet MS" pitchFamily="34" charset="-120"/>
               </a:rPr>
-              <a:t xml:space="preserve">  Causal Validation: Resolving the Add-on Paradox</a:t>
+              <a:t>  Causal Validation: Resolving the Add-on Paradox</a:t>
             </a:r>
             <a:endParaRPr lang="en-US" sz="2200" dirty="0"/>
           </a:p>

--- a/Customer_Churn_Final.pptx
+++ b/Customer_Churn_Final.pptx
@@ -7620,7 +7620,7 @@
                 <a:latin typeface="Trebuchet MS" pitchFamily="34" charset="0"/>
                 <a:hlinkClick r:id="rId2"/>
               </a:rPr>
-              <a:t>bayesian-dashboard-303092178542.us-central1.run.app</a:t>
+              <a:t>bayesian-dashboard-128505233033.us-central1.run.app</a:t>
             </a:r>
           </a:p>
         </p:txBody>
@@ -7763,7 +7763,7 @@
                 </a:solidFill>
                 <a:latin typeface="Calibri" pitchFamily="34" charset="0"/>
               </a:rPr>
-              <a:t>Deployed on Google Cloud Run (GCP). Containerised via Docker. Auto-scaling serverless architecture. Zero-downtime updates. Procfile + requirements.txt for reproducibility.</a:t>
+              <a:t>Deployed on Google Cloud Run (GCP). Containerised via Docker (python:3.9-slim). Built with Cloud Build (amd64). Auto-scaling serverless. Zero-downtime rollback via revision history.</a:t>
             </a:r>
           </a:p>
         </p:txBody>
@@ -8117,7 +8117,7 @@
                 </a:solidFill>
                 <a:latin typeface="Calibri" pitchFamily="34" charset="0"/>
               </a:rPr>
-              <a:t>Deployment scripts in Phase_5_Deployment_guide/  ·  Dockerfile + Cloud Run config  ·  Demo: https://bayesian-dashboard-303092178542.us-central1.run.app/</a:t>
+              <a:t>Deployment protocol in Phase_5_Depolyment guide/DEPLOYMENT.md  ·  Dockerfile + Cloud Build config  ·  Demo: https://bayesian-dashboard-128505233033.us-central1.run.app/</a:t>
             </a:r>
           </a:p>
         </p:txBody>
